--- a/assets/images/Administration_Protocols.pptx
+++ b/assets/images/Administration_Protocols.pptx
@@ -5,11 +5,12 @@
     <p:sldMasterId id="2147483684" r:id="rId4"/>
   </p:sldMasterIdLst>
   <p:notesMasterIdLst>
-    <p:notesMasterId r:id="rId7"/>
+    <p:notesMasterId r:id="rId8"/>
   </p:notesMasterIdLst>
   <p:sldIdLst>
     <p:sldId id="256" r:id="rId5"/>
     <p:sldId id="257" r:id="rId6"/>
+    <p:sldId id="258" r:id="rId7"/>
   </p:sldIdLst>
   <p:sldSz cx="21601113" cy="14400213"/>
   <p:notesSz cx="9144000" cy="6858000"/>
@@ -403,7 +404,7 @@
           <a:p>
             <a:fld id="{43466010-90F5-41E6-AAE8-7E580DBF8C7C}" type="datetimeFigureOut">
               <a:rPr lang="en-DK" smtClean="0"/>
-              <a:t>23/02/2026</a:t>
+              <a:t>26/02/2026</a:t>
             </a:fld>
             <a:endParaRPr lang="en-DK"/>
           </a:p>
@@ -978,7 +979,7 @@
           <a:p>
             <a:fld id="{F1465E3F-0B9F-47C9-9E08-5C827E095B3E}" type="datetimeFigureOut">
               <a:rPr lang="en-DK" smtClean="0"/>
-              <a:t>23/02/2026</a:t>
+              <a:t>26/02/2026</a:t>
             </a:fld>
             <a:endParaRPr lang="en-DK"/>
           </a:p>
@@ -1148,7 +1149,7 @@
           <a:p>
             <a:fld id="{F1465E3F-0B9F-47C9-9E08-5C827E095B3E}" type="datetimeFigureOut">
               <a:rPr lang="en-DK" smtClean="0"/>
-              <a:t>23/02/2026</a:t>
+              <a:t>26/02/2026</a:t>
             </a:fld>
             <a:endParaRPr lang="en-DK"/>
           </a:p>
@@ -1328,7 +1329,7 @@
           <a:p>
             <a:fld id="{F1465E3F-0B9F-47C9-9E08-5C827E095B3E}" type="datetimeFigureOut">
               <a:rPr lang="en-DK" smtClean="0"/>
-              <a:t>23/02/2026</a:t>
+              <a:t>26/02/2026</a:t>
             </a:fld>
             <a:endParaRPr lang="en-DK"/>
           </a:p>
@@ -1498,7 +1499,7 @@
           <a:p>
             <a:fld id="{F1465E3F-0B9F-47C9-9E08-5C827E095B3E}" type="datetimeFigureOut">
               <a:rPr lang="en-DK" smtClean="0"/>
-              <a:t>23/02/2026</a:t>
+              <a:t>26/02/2026</a:t>
             </a:fld>
             <a:endParaRPr lang="en-DK"/>
           </a:p>
@@ -1744,7 +1745,7 @@
           <a:p>
             <a:fld id="{F1465E3F-0B9F-47C9-9E08-5C827E095B3E}" type="datetimeFigureOut">
               <a:rPr lang="en-DK" smtClean="0"/>
-              <a:t>23/02/2026</a:t>
+              <a:t>26/02/2026</a:t>
             </a:fld>
             <a:endParaRPr lang="en-DK"/>
           </a:p>
@@ -1976,7 +1977,7 @@
           <a:p>
             <a:fld id="{F1465E3F-0B9F-47C9-9E08-5C827E095B3E}" type="datetimeFigureOut">
               <a:rPr lang="en-DK" smtClean="0"/>
-              <a:t>23/02/2026</a:t>
+              <a:t>26/02/2026</a:t>
             </a:fld>
             <a:endParaRPr lang="en-DK"/>
           </a:p>
@@ -2343,7 +2344,7 @@
           <a:p>
             <a:fld id="{F1465E3F-0B9F-47C9-9E08-5C827E095B3E}" type="datetimeFigureOut">
               <a:rPr lang="en-DK" smtClean="0"/>
-              <a:t>23/02/2026</a:t>
+              <a:t>26/02/2026</a:t>
             </a:fld>
             <a:endParaRPr lang="en-DK"/>
           </a:p>
@@ -2461,7 +2462,7 @@
           <a:p>
             <a:fld id="{F1465E3F-0B9F-47C9-9E08-5C827E095B3E}" type="datetimeFigureOut">
               <a:rPr lang="en-DK" smtClean="0"/>
-              <a:t>23/02/2026</a:t>
+              <a:t>26/02/2026</a:t>
             </a:fld>
             <a:endParaRPr lang="en-DK"/>
           </a:p>
@@ -2556,7 +2557,7 @@
           <a:p>
             <a:fld id="{F1465E3F-0B9F-47C9-9E08-5C827E095B3E}" type="datetimeFigureOut">
               <a:rPr lang="en-DK" smtClean="0"/>
-              <a:t>23/02/2026</a:t>
+              <a:t>26/02/2026</a:t>
             </a:fld>
             <a:endParaRPr lang="en-DK"/>
           </a:p>
@@ -2833,7 +2834,7 @@
           <a:p>
             <a:fld id="{F1465E3F-0B9F-47C9-9E08-5C827E095B3E}" type="datetimeFigureOut">
               <a:rPr lang="en-DK" smtClean="0"/>
-              <a:t>23/02/2026</a:t>
+              <a:t>26/02/2026</a:t>
             </a:fld>
             <a:endParaRPr lang="en-DK"/>
           </a:p>
@@ -3090,7 +3091,7 @@
           <a:p>
             <a:fld id="{F1465E3F-0B9F-47C9-9E08-5C827E095B3E}" type="datetimeFigureOut">
               <a:rPr lang="en-DK" smtClean="0"/>
-              <a:t>23/02/2026</a:t>
+              <a:t>26/02/2026</a:t>
             </a:fld>
             <a:endParaRPr lang="en-DK"/>
           </a:p>
@@ -3303,7 +3304,7 @@
           <a:p>
             <a:fld id="{F1465E3F-0B9F-47C9-9E08-5C827E095B3E}" type="datetimeFigureOut">
               <a:rPr lang="en-DK" smtClean="0"/>
-              <a:t>23/02/2026</a:t>
+              <a:t>26/02/2026</a:t>
             </a:fld>
             <a:endParaRPr lang="en-DK"/>
           </a:p>
@@ -3708,6 +3709,704 @@
           <a:chExt cx="0" cy="0"/>
         </a:xfrm>
       </p:grpSpPr>
+      <p:pic>
+        <p:nvPicPr>
+          <p:cNvPr id="3" name="Picture 2" descr="The image displays a LabBench Protocol Repository interface, featuring various protocols for psychometric and psychophysical studies, including tasks on depression, anxiety, stress, cuff pressure, and response inhibition.&#10;&#10;AI-generated content may be incorrect.">
+            <a:extLst>
+              <a:ext uri="{FF2B5EF4-FFF2-40B4-BE49-F238E27FC236}">
+                <a16:creationId xmlns:a16="http://schemas.microsoft.com/office/drawing/2014/main" id="{717AEE05-5C7C-97EC-CEBA-26200DA6E80B}"/>
+              </a:ext>
+            </a:extLst>
+          </p:cNvPr>
+          <p:cNvPicPr>
+            <a:picLocks noChangeAspect="1"/>
+          </p:cNvPicPr>
+          <p:nvPr/>
+        </p:nvPicPr>
+        <p:blipFill>
+          <a:blip r:embed="rId3"/>
+          <a:stretch>
+            <a:fillRect/>
+          </a:stretch>
+        </p:blipFill>
+        <p:spPr>
+          <a:xfrm>
+            <a:off x="8100556" y="5296630"/>
+            <a:ext cx="5400000" cy="2511628"/>
+          </a:xfrm>
+          <a:prstGeom prst="rect">
+            <a:avLst/>
+          </a:prstGeom>
+        </p:spPr>
+      </p:pic>
+      <p:sp>
+        <p:nvSpPr>
+          <p:cNvPr id="4" name="Oval 3">
+            <a:extLst>
+              <a:ext uri="{FF2B5EF4-FFF2-40B4-BE49-F238E27FC236}">
+                <a16:creationId xmlns:a16="http://schemas.microsoft.com/office/drawing/2014/main" id="{56BB98A6-D86A-E3E6-9C55-09C28B0F6797}"/>
+              </a:ext>
+            </a:extLst>
+          </p:cNvPr>
+          <p:cNvSpPr/>
+          <p:nvPr/>
+        </p:nvSpPr>
+        <p:spPr>
+          <a:xfrm>
+            <a:off x="13077240" y="5520690"/>
+            <a:ext cx="180000" cy="180000"/>
+          </a:xfrm>
+          <a:prstGeom prst="ellipse">
+            <a:avLst/>
+          </a:prstGeom>
+          <a:noFill/>
+          <a:ln>
+            <a:solidFill>
+              <a:srgbClr val="FF0000"/>
+            </a:solidFill>
+          </a:ln>
+        </p:spPr>
+        <p:style>
+          <a:lnRef idx="2">
+            <a:schemeClr val="accent1">
+              <a:shade val="15000"/>
+            </a:schemeClr>
+          </a:lnRef>
+          <a:fillRef idx="1">
+            <a:schemeClr val="accent1"/>
+          </a:fillRef>
+          <a:effectRef idx="0">
+            <a:schemeClr val="accent1"/>
+          </a:effectRef>
+          <a:fontRef idx="minor">
+            <a:schemeClr val="lt1"/>
+          </a:fontRef>
+        </p:style>
+        <p:txBody>
+          <a:bodyPr rtlCol="0" anchor="ctr"/>
+          <a:lstStyle/>
+          <a:p>
+            <a:pPr algn="ctr"/>
+            <a:endParaRPr lang="en-DK"/>
+          </a:p>
+        </p:txBody>
+      </p:sp>
+      <p:sp>
+        <p:nvSpPr>
+          <p:cNvPr id="5" name="Oval 4">
+            <a:extLst>
+              <a:ext uri="{FF2B5EF4-FFF2-40B4-BE49-F238E27FC236}">
+                <a16:creationId xmlns:a16="http://schemas.microsoft.com/office/drawing/2014/main" id="{D9C033B2-4203-13DA-7370-87D0D5B4F5D0}"/>
+              </a:ext>
+            </a:extLst>
+          </p:cNvPr>
+          <p:cNvSpPr/>
+          <p:nvPr/>
+        </p:nvSpPr>
+        <p:spPr>
+          <a:xfrm>
+            <a:off x="13260120" y="5520690"/>
+            <a:ext cx="180000" cy="180000"/>
+          </a:xfrm>
+          <a:prstGeom prst="ellipse">
+            <a:avLst/>
+          </a:prstGeom>
+          <a:noFill/>
+          <a:ln>
+            <a:solidFill>
+              <a:srgbClr val="FF0000"/>
+            </a:solidFill>
+          </a:ln>
+        </p:spPr>
+        <p:style>
+          <a:lnRef idx="2">
+            <a:schemeClr val="accent1">
+              <a:shade val="15000"/>
+            </a:schemeClr>
+          </a:lnRef>
+          <a:fillRef idx="1">
+            <a:schemeClr val="accent1"/>
+          </a:fillRef>
+          <a:effectRef idx="0">
+            <a:schemeClr val="accent1"/>
+          </a:effectRef>
+          <a:fontRef idx="minor">
+            <a:schemeClr val="lt1"/>
+          </a:fontRef>
+        </p:style>
+        <p:txBody>
+          <a:bodyPr rtlCol="0" anchor="ctr"/>
+          <a:lstStyle/>
+          <a:p>
+            <a:pPr algn="ctr"/>
+            <a:endParaRPr lang="en-DK"/>
+          </a:p>
+        </p:txBody>
+      </p:sp>
+      <p:sp>
+        <p:nvSpPr>
+          <p:cNvPr id="6" name="Oval 5">
+            <a:extLst>
+              <a:ext uri="{FF2B5EF4-FFF2-40B4-BE49-F238E27FC236}">
+                <a16:creationId xmlns:a16="http://schemas.microsoft.com/office/drawing/2014/main" id="{8069EDEA-F976-F015-8E0B-96AA282C4F86}"/>
+              </a:ext>
+            </a:extLst>
+          </p:cNvPr>
+          <p:cNvSpPr/>
+          <p:nvPr/>
+        </p:nvSpPr>
+        <p:spPr>
+          <a:xfrm>
+            <a:off x="10212120" y="5520690"/>
+            <a:ext cx="180000" cy="180000"/>
+          </a:xfrm>
+          <a:prstGeom prst="ellipse">
+            <a:avLst/>
+          </a:prstGeom>
+          <a:noFill/>
+          <a:ln>
+            <a:solidFill>
+              <a:srgbClr val="FF0000"/>
+            </a:solidFill>
+          </a:ln>
+        </p:spPr>
+        <p:style>
+          <a:lnRef idx="2">
+            <a:schemeClr val="accent1">
+              <a:shade val="15000"/>
+            </a:schemeClr>
+          </a:lnRef>
+          <a:fillRef idx="1">
+            <a:schemeClr val="accent1"/>
+          </a:fillRef>
+          <a:effectRef idx="0">
+            <a:schemeClr val="accent1"/>
+          </a:effectRef>
+          <a:fontRef idx="minor">
+            <a:schemeClr val="lt1"/>
+          </a:fontRef>
+        </p:style>
+        <p:txBody>
+          <a:bodyPr rtlCol="0" anchor="ctr"/>
+          <a:lstStyle/>
+          <a:p>
+            <a:pPr algn="ctr"/>
+            <a:endParaRPr lang="en-DK"/>
+          </a:p>
+        </p:txBody>
+      </p:sp>
+      <p:sp>
+        <p:nvSpPr>
+          <p:cNvPr id="7" name="Rectangle 6">
+            <a:extLst>
+              <a:ext uri="{FF2B5EF4-FFF2-40B4-BE49-F238E27FC236}">
+                <a16:creationId xmlns:a16="http://schemas.microsoft.com/office/drawing/2014/main" id="{AA53E3E7-BF2C-410F-3C28-629BFB39DEDE}"/>
+              </a:ext>
+            </a:extLst>
+          </p:cNvPr>
+          <p:cNvSpPr/>
+          <p:nvPr/>
+        </p:nvSpPr>
+        <p:spPr>
+          <a:xfrm>
+            <a:off x="8503920" y="5410200"/>
+            <a:ext cx="1888200" cy="2398058"/>
+          </a:xfrm>
+          <a:prstGeom prst="rect">
+            <a:avLst/>
+          </a:prstGeom>
+          <a:noFill/>
+          <a:ln>
+            <a:solidFill>
+              <a:srgbClr val="FF0000"/>
+            </a:solidFill>
+          </a:ln>
+        </p:spPr>
+        <p:style>
+          <a:lnRef idx="2">
+            <a:schemeClr val="accent1">
+              <a:shade val="15000"/>
+            </a:schemeClr>
+          </a:lnRef>
+          <a:fillRef idx="1">
+            <a:schemeClr val="accent1"/>
+          </a:fillRef>
+          <a:effectRef idx="0">
+            <a:schemeClr val="accent1"/>
+          </a:effectRef>
+          <a:fontRef idx="minor">
+            <a:schemeClr val="lt1"/>
+          </a:fontRef>
+        </p:style>
+        <p:txBody>
+          <a:bodyPr rtlCol="0" anchor="ctr"/>
+          <a:lstStyle/>
+          <a:p>
+            <a:pPr algn="ctr"/>
+            <a:endParaRPr lang="en-DK"/>
+          </a:p>
+        </p:txBody>
+      </p:sp>
+      <p:sp>
+        <p:nvSpPr>
+          <p:cNvPr id="9" name="Rectangle 8">
+            <a:extLst>
+              <a:ext uri="{FF2B5EF4-FFF2-40B4-BE49-F238E27FC236}">
+                <a16:creationId xmlns:a16="http://schemas.microsoft.com/office/drawing/2014/main" id="{1FCE4B0A-C22E-CA39-4F74-88D2D734243B}"/>
+              </a:ext>
+            </a:extLst>
+          </p:cNvPr>
+          <p:cNvSpPr/>
+          <p:nvPr/>
+        </p:nvSpPr>
+        <p:spPr>
+          <a:xfrm>
+            <a:off x="10465304" y="5433060"/>
+            <a:ext cx="2974816" cy="2376000"/>
+          </a:xfrm>
+          <a:prstGeom prst="rect">
+            <a:avLst/>
+          </a:prstGeom>
+          <a:noFill/>
+          <a:ln>
+            <a:solidFill>
+              <a:srgbClr val="FF0000"/>
+            </a:solidFill>
+          </a:ln>
+        </p:spPr>
+        <p:style>
+          <a:lnRef idx="2">
+            <a:schemeClr val="accent1">
+              <a:shade val="15000"/>
+            </a:schemeClr>
+          </a:lnRef>
+          <a:fillRef idx="1">
+            <a:schemeClr val="accent1"/>
+          </a:fillRef>
+          <a:effectRef idx="0">
+            <a:schemeClr val="accent1"/>
+          </a:effectRef>
+          <a:fontRef idx="minor">
+            <a:schemeClr val="lt1"/>
+          </a:fontRef>
+        </p:style>
+        <p:txBody>
+          <a:bodyPr rtlCol="0" anchor="ctr"/>
+          <a:lstStyle/>
+          <a:p>
+            <a:pPr algn="ctr"/>
+            <a:endParaRPr lang="en-DK"/>
+          </a:p>
+        </p:txBody>
+      </p:sp>
+      <p:sp>
+        <p:nvSpPr>
+          <p:cNvPr id="10" name="TextBox 9">
+            <a:extLst>
+              <a:ext uri="{FF2B5EF4-FFF2-40B4-BE49-F238E27FC236}">
+                <a16:creationId xmlns:a16="http://schemas.microsoft.com/office/drawing/2014/main" id="{FAFAEDAF-60E0-6C4C-6AD8-9A31802D7C75}"/>
+              </a:ext>
+            </a:extLst>
+          </p:cNvPr>
+          <p:cNvSpPr txBox="1"/>
+          <p:nvPr/>
+        </p:nvSpPr>
+        <p:spPr>
+          <a:xfrm>
+            <a:off x="8440789" y="8108668"/>
+            <a:ext cx="2014462" cy="369332"/>
+          </a:xfrm>
+          <a:prstGeom prst="rect">
+            <a:avLst/>
+          </a:prstGeom>
+          <a:noFill/>
+        </p:spPr>
+        <p:txBody>
+          <a:bodyPr wrap="none" rtlCol="0">
+            <a:spAutoFit/>
+          </a:bodyPr>
+          <a:lstStyle/>
+          <a:p>
+            <a:r>
+              <a:rPr lang="en-US" dirty="0"/>
+              <a:t>List of repositories</a:t>
+            </a:r>
+            <a:endParaRPr lang="en-DK" dirty="0"/>
+          </a:p>
+        </p:txBody>
+      </p:sp>
+      <p:sp>
+        <p:nvSpPr>
+          <p:cNvPr id="11" name="TextBox 10">
+            <a:extLst>
+              <a:ext uri="{FF2B5EF4-FFF2-40B4-BE49-F238E27FC236}">
+                <a16:creationId xmlns:a16="http://schemas.microsoft.com/office/drawing/2014/main" id="{D9C5AD95-A40F-0134-1C27-50304F5AA878}"/>
+              </a:ext>
+            </a:extLst>
+          </p:cNvPr>
+          <p:cNvSpPr txBox="1"/>
+          <p:nvPr/>
+        </p:nvSpPr>
+        <p:spPr>
+          <a:xfrm>
+            <a:off x="9107434" y="4773477"/>
+            <a:ext cx="2389372" cy="369332"/>
+          </a:xfrm>
+          <a:prstGeom prst="rect">
+            <a:avLst/>
+          </a:prstGeom>
+          <a:noFill/>
+        </p:spPr>
+        <p:txBody>
+          <a:bodyPr wrap="none" rtlCol="0">
+            <a:spAutoFit/>
+          </a:bodyPr>
+          <a:lstStyle/>
+          <a:p>
+            <a:r>
+              <a:rPr lang="en-US" dirty="0"/>
+              <a:t>Configure repositories</a:t>
+            </a:r>
+            <a:endParaRPr lang="en-DK" dirty="0"/>
+          </a:p>
+        </p:txBody>
+      </p:sp>
+      <p:sp>
+        <p:nvSpPr>
+          <p:cNvPr id="12" name="TextBox 11">
+            <a:extLst>
+              <a:ext uri="{FF2B5EF4-FFF2-40B4-BE49-F238E27FC236}">
+                <a16:creationId xmlns:a16="http://schemas.microsoft.com/office/drawing/2014/main" id="{6EF74991-EFCA-1B29-9BC5-F9875150BAAF}"/>
+              </a:ext>
+            </a:extLst>
+          </p:cNvPr>
+          <p:cNvSpPr txBox="1"/>
+          <p:nvPr/>
+        </p:nvSpPr>
+        <p:spPr>
+          <a:xfrm>
+            <a:off x="10894762" y="8108668"/>
+            <a:ext cx="2115900" cy="369332"/>
+          </a:xfrm>
+          <a:prstGeom prst="rect">
+            <a:avLst/>
+          </a:prstGeom>
+          <a:noFill/>
+        </p:spPr>
+        <p:txBody>
+          <a:bodyPr wrap="none" rtlCol="0">
+            <a:spAutoFit/>
+          </a:bodyPr>
+          <a:lstStyle/>
+          <a:p>
+            <a:r>
+              <a:rPr lang="en-US" dirty="0"/>
+              <a:t>Selected repository</a:t>
+            </a:r>
+            <a:endParaRPr lang="en-DK" dirty="0"/>
+          </a:p>
+        </p:txBody>
+      </p:sp>
+      <p:sp>
+        <p:nvSpPr>
+          <p:cNvPr id="13" name="TextBox 12">
+            <a:extLst>
+              <a:ext uri="{FF2B5EF4-FFF2-40B4-BE49-F238E27FC236}">
+                <a16:creationId xmlns:a16="http://schemas.microsoft.com/office/drawing/2014/main" id="{3C8A010B-C9F3-5014-ACF9-A669CD2AAA2B}"/>
+              </a:ext>
+            </a:extLst>
+          </p:cNvPr>
+          <p:cNvSpPr txBox="1"/>
+          <p:nvPr/>
+        </p:nvSpPr>
+        <p:spPr>
+          <a:xfrm>
+            <a:off x="12281965" y="4773477"/>
+            <a:ext cx="1770549" cy="369332"/>
+          </a:xfrm>
+          <a:prstGeom prst="rect">
+            <a:avLst/>
+          </a:prstGeom>
+          <a:noFill/>
+        </p:spPr>
+        <p:txBody>
+          <a:bodyPr wrap="none" rtlCol="0">
+            <a:spAutoFit/>
+          </a:bodyPr>
+          <a:lstStyle/>
+          <a:p>
+            <a:r>
+              <a:rPr lang="en-US" dirty="0"/>
+              <a:t>Reload protocol</a:t>
+            </a:r>
+            <a:endParaRPr lang="en-DK" dirty="0"/>
+          </a:p>
+        </p:txBody>
+      </p:sp>
+      <p:sp>
+        <p:nvSpPr>
+          <p:cNvPr id="14" name="TextBox 13">
+            <a:extLst>
+              <a:ext uri="{FF2B5EF4-FFF2-40B4-BE49-F238E27FC236}">
+                <a16:creationId xmlns:a16="http://schemas.microsoft.com/office/drawing/2014/main" id="{2949E6AB-7707-8E1F-9150-F66CD22081B7}"/>
+              </a:ext>
+            </a:extLst>
+          </p:cNvPr>
+          <p:cNvSpPr txBox="1"/>
+          <p:nvPr/>
+        </p:nvSpPr>
+        <p:spPr>
+          <a:xfrm>
+            <a:off x="13693020" y="5426024"/>
+            <a:ext cx="2029530" cy="369332"/>
+          </a:xfrm>
+          <a:prstGeom prst="rect">
+            <a:avLst/>
+          </a:prstGeom>
+          <a:noFill/>
+        </p:spPr>
+        <p:txBody>
+          <a:bodyPr wrap="none" rtlCol="0">
+            <a:spAutoFit/>
+          </a:bodyPr>
+          <a:lstStyle/>
+          <a:p>
+            <a:r>
+              <a:rPr lang="en-US" dirty="0"/>
+              <a:t>Create experiment</a:t>
+            </a:r>
+            <a:endParaRPr lang="en-DK" dirty="0"/>
+          </a:p>
+        </p:txBody>
+      </p:sp>
+      <p:cxnSp>
+        <p:nvCxnSpPr>
+          <p:cNvPr id="16" name="Straight Arrow Connector 15">
+            <a:extLst>
+              <a:ext uri="{FF2B5EF4-FFF2-40B4-BE49-F238E27FC236}">
+                <a16:creationId xmlns:a16="http://schemas.microsoft.com/office/drawing/2014/main" id="{CD700F71-8E99-8143-8946-1DD6816BF5B8}"/>
+              </a:ext>
+            </a:extLst>
+          </p:cNvPr>
+          <p:cNvCxnSpPr>
+            <a:stCxn id="11" idx="2"/>
+            <a:endCxn id="6" idx="0"/>
+          </p:cNvCxnSpPr>
+          <p:nvPr/>
+        </p:nvCxnSpPr>
+        <p:spPr>
+          <a:xfrm>
+            <a:off x="10302120" y="5142809"/>
+            <a:ext cx="0" cy="377881"/>
+          </a:xfrm>
+          <a:prstGeom prst="straightConnector1">
+            <a:avLst/>
+          </a:prstGeom>
+          <a:ln w="28575">
+            <a:solidFill>
+              <a:srgbClr val="FF0000"/>
+            </a:solidFill>
+            <a:tailEnd type="triangle"/>
+          </a:ln>
+        </p:spPr>
+        <p:style>
+          <a:lnRef idx="2">
+            <a:schemeClr val="accent1"/>
+          </a:lnRef>
+          <a:fillRef idx="0">
+            <a:schemeClr val="accent1"/>
+          </a:fillRef>
+          <a:effectRef idx="1">
+            <a:schemeClr val="accent1"/>
+          </a:effectRef>
+          <a:fontRef idx="minor">
+            <a:schemeClr val="tx1"/>
+          </a:fontRef>
+        </p:style>
+      </p:cxnSp>
+      <p:cxnSp>
+        <p:nvCxnSpPr>
+          <p:cNvPr id="17" name="Straight Arrow Connector 16">
+            <a:extLst>
+              <a:ext uri="{FF2B5EF4-FFF2-40B4-BE49-F238E27FC236}">
+                <a16:creationId xmlns:a16="http://schemas.microsoft.com/office/drawing/2014/main" id="{607F1F4B-23F0-0BF1-680B-C4A56FBA6379}"/>
+              </a:ext>
+            </a:extLst>
+          </p:cNvPr>
+          <p:cNvCxnSpPr>
+            <a:cxnSpLocks/>
+            <a:stCxn id="13" idx="2"/>
+            <a:endCxn id="4" idx="0"/>
+          </p:cNvCxnSpPr>
+          <p:nvPr/>
+        </p:nvCxnSpPr>
+        <p:spPr>
+          <a:xfrm>
+            <a:off x="13167240" y="5142809"/>
+            <a:ext cx="0" cy="377881"/>
+          </a:xfrm>
+          <a:prstGeom prst="straightConnector1">
+            <a:avLst/>
+          </a:prstGeom>
+          <a:ln w="28575">
+            <a:solidFill>
+              <a:srgbClr val="FF0000"/>
+            </a:solidFill>
+            <a:tailEnd type="triangle"/>
+          </a:ln>
+        </p:spPr>
+        <p:style>
+          <a:lnRef idx="2">
+            <a:schemeClr val="accent1"/>
+          </a:lnRef>
+          <a:fillRef idx="0">
+            <a:schemeClr val="accent1"/>
+          </a:fillRef>
+          <a:effectRef idx="1">
+            <a:schemeClr val="accent1"/>
+          </a:effectRef>
+          <a:fontRef idx="minor">
+            <a:schemeClr val="tx1"/>
+          </a:fontRef>
+        </p:style>
+      </p:cxnSp>
+      <p:cxnSp>
+        <p:nvCxnSpPr>
+          <p:cNvPr id="18" name="Straight Arrow Connector 17">
+            <a:extLst>
+              <a:ext uri="{FF2B5EF4-FFF2-40B4-BE49-F238E27FC236}">
+                <a16:creationId xmlns:a16="http://schemas.microsoft.com/office/drawing/2014/main" id="{98B3BB37-9380-15BC-E751-F2D4B1FA9697}"/>
+              </a:ext>
+            </a:extLst>
+          </p:cNvPr>
+          <p:cNvCxnSpPr>
+            <a:cxnSpLocks/>
+            <a:stCxn id="14" idx="1"/>
+          </p:cNvCxnSpPr>
+          <p:nvPr/>
+        </p:nvCxnSpPr>
+        <p:spPr>
+          <a:xfrm flipH="1">
+            <a:off x="13440120" y="5610690"/>
+            <a:ext cx="252900" cy="3868"/>
+          </a:xfrm>
+          <a:prstGeom prst="straightConnector1">
+            <a:avLst/>
+          </a:prstGeom>
+          <a:ln w="28575">
+            <a:solidFill>
+              <a:srgbClr val="FF0000"/>
+            </a:solidFill>
+            <a:tailEnd type="triangle"/>
+          </a:ln>
+        </p:spPr>
+        <p:style>
+          <a:lnRef idx="2">
+            <a:schemeClr val="accent1"/>
+          </a:lnRef>
+          <a:fillRef idx="0">
+            <a:schemeClr val="accent1"/>
+          </a:fillRef>
+          <a:effectRef idx="1">
+            <a:schemeClr val="accent1"/>
+          </a:effectRef>
+          <a:fontRef idx="minor">
+            <a:schemeClr val="tx1"/>
+          </a:fontRef>
+        </p:style>
+      </p:cxnSp>
+      <p:cxnSp>
+        <p:nvCxnSpPr>
+          <p:cNvPr id="20" name="Straight Arrow Connector 19">
+            <a:extLst>
+              <a:ext uri="{FF2B5EF4-FFF2-40B4-BE49-F238E27FC236}">
+                <a16:creationId xmlns:a16="http://schemas.microsoft.com/office/drawing/2014/main" id="{ADFF39EA-93F4-AD11-B4D7-505BE0A9E084}"/>
+              </a:ext>
+            </a:extLst>
+          </p:cNvPr>
+          <p:cNvCxnSpPr>
+            <a:cxnSpLocks/>
+            <a:stCxn id="10" idx="0"/>
+            <a:endCxn id="7" idx="2"/>
+          </p:cNvCxnSpPr>
+          <p:nvPr/>
+        </p:nvCxnSpPr>
+        <p:spPr>
+          <a:xfrm flipV="1">
+            <a:off x="9448020" y="7808258"/>
+            <a:ext cx="0" cy="300410"/>
+          </a:xfrm>
+          <a:prstGeom prst="straightConnector1">
+            <a:avLst/>
+          </a:prstGeom>
+          <a:ln w="28575">
+            <a:solidFill>
+              <a:srgbClr val="FF0000"/>
+            </a:solidFill>
+            <a:tailEnd type="triangle"/>
+          </a:ln>
+        </p:spPr>
+        <p:style>
+          <a:lnRef idx="2">
+            <a:schemeClr val="accent1"/>
+          </a:lnRef>
+          <a:fillRef idx="0">
+            <a:schemeClr val="accent1"/>
+          </a:fillRef>
+          <a:effectRef idx="1">
+            <a:schemeClr val="accent1"/>
+          </a:effectRef>
+          <a:fontRef idx="minor">
+            <a:schemeClr val="tx1"/>
+          </a:fontRef>
+        </p:style>
+      </p:cxnSp>
+      <p:cxnSp>
+        <p:nvCxnSpPr>
+          <p:cNvPr id="21" name="Straight Arrow Connector 20">
+            <a:extLst>
+              <a:ext uri="{FF2B5EF4-FFF2-40B4-BE49-F238E27FC236}">
+                <a16:creationId xmlns:a16="http://schemas.microsoft.com/office/drawing/2014/main" id="{129C0CFD-9ED5-536E-C1E0-AFA41698C133}"/>
+              </a:ext>
+            </a:extLst>
+          </p:cNvPr>
+          <p:cNvCxnSpPr>
+            <a:cxnSpLocks/>
+            <a:stCxn id="12" idx="0"/>
+            <a:endCxn id="9" idx="2"/>
+          </p:cNvCxnSpPr>
+          <p:nvPr/>
+        </p:nvCxnSpPr>
+        <p:spPr>
+          <a:xfrm flipV="1">
+            <a:off x="11952712" y="7809060"/>
+            <a:ext cx="0" cy="299608"/>
+          </a:xfrm>
+          <a:prstGeom prst="straightConnector1">
+            <a:avLst/>
+          </a:prstGeom>
+          <a:ln w="28575">
+            <a:solidFill>
+              <a:srgbClr val="FF0000"/>
+            </a:solidFill>
+            <a:tailEnd type="triangle"/>
+          </a:ln>
+        </p:spPr>
+        <p:style>
+          <a:lnRef idx="2">
+            <a:schemeClr val="accent1"/>
+          </a:lnRef>
+          <a:fillRef idx="0">
+            <a:schemeClr val="accent1"/>
+          </a:fillRef>
+          <a:effectRef idx="1">
+            <a:schemeClr val="accent1"/>
+          </a:effectRef>
+          <a:fontRef idx="minor">
+            <a:schemeClr val="tx1"/>
+          </a:fontRef>
+        </p:style>
+      </p:cxnSp>
     </p:spTree>
     <p:extLst>
       <p:ext uri="{BB962C8B-B14F-4D97-AF65-F5344CB8AC3E}">
@@ -3738,10 +4437,802 @@
           <a:chExt cx="0" cy="0"/>
         </a:xfrm>
       </p:grpSpPr>
+      <p:pic>
+        <p:nvPicPr>
+          <p:cNvPr id="28" name="Picture 27" descr="The image shows a user interface for managing a repository on Labbench.io, with an input field for adding a new file or URL.&#10;&#10;AI-generated content may be incorrect.">
+            <a:extLst>
+              <a:ext uri="{FF2B5EF4-FFF2-40B4-BE49-F238E27FC236}">
+                <a16:creationId xmlns:a16="http://schemas.microsoft.com/office/drawing/2014/main" id="{0F4901A9-98B4-6BA1-0A11-987F2B0D8B72}"/>
+              </a:ext>
+            </a:extLst>
+          </p:cNvPr>
+          <p:cNvPicPr>
+            <a:picLocks noChangeAspect="1"/>
+          </p:cNvPicPr>
+          <p:nvPr/>
+        </p:nvPicPr>
+        <p:blipFill>
+          <a:blip r:embed="rId3"/>
+          <a:srcRect l="1349" t="60657" r="424" b="561"/>
+          <a:stretch>
+            <a:fillRect/>
+          </a:stretch>
+        </p:blipFill>
+        <p:spPr>
+          <a:xfrm>
+            <a:off x="8927306" y="3778580"/>
+            <a:ext cx="3536157" cy="1102520"/>
+          </a:xfrm>
+          <a:prstGeom prst="rect">
+            <a:avLst/>
+          </a:prstGeom>
+        </p:spPr>
+      </p:pic>
+      <p:pic>
+        <p:nvPicPr>
+          <p:cNvPr id="3" name="Picture 2" descr="The image shows a user interface for managing a repository on Labbench.io, with an input field for adding a new file or URL.&#10;&#10;AI-generated content may be incorrect.">
+            <a:extLst>
+              <a:ext uri="{FF2B5EF4-FFF2-40B4-BE49-F238E27FC236}">
+                <a16:creationId xmlns:a16="http://schemas.microsoft.com/office/drawing/2014/main" id="{73655F92-62CC-EB37-1AAC-3E3862C74DAD}"/>
+              </a:ext>
+            </a:extLst>
+          </p:cNvPr>
+          <p:cNvPicPr>
+            <a:picLocks noChangeAspect="1"/>
+          </p:cNvPicPr>
+          <p:nvPr/>
+        </p:nvPicPr>
+        <p:blipFill>
+          <a:blip r:embed="rId3"/>
+          <a:srcRect l="1349" r="424" b="67487"/>
+          <a:stretch>
+            <a:fillRect/>
+          </a:stretch>
+        </p:blipFill>
+        <p:spPr>
+          <a:xfrm>
+            <a:off x="8927306" y="3571516"/>
+            <a:ext cx="3536157" cy="924284"/>
+          </a:xfrm>
+          <a:prstGeom prst="rect">
+            <a:avLst/>
+          </a:prstGeom>
+        </p:spPr>
+      </p:pic>
+      <p:sp>
+        <p:nvSpPr>
+          <p:cNvPr id="4" name="Rectangle: Rounded Corners 3">
+            <a:extLst>
+              <a:ext uri="{FF2B5EF4-FFF2-40B4-BE49-F238E27FC236}">
+                <a16:creationId xmlns:a16="http://schemas.microsoft.com/office/drawing/2014/main" id="{2CDE19F8-88C5-D514-AE4A-C33E47E9D164}"/>
+              </a:ext>
+            </a:extLst>
+          </p:cNvPr>
+          <p:cNvSpPr/>
+          <p:nvPr/>
+        </p:nvSpPr>
+        <p:spPr>
+          <a:xfrm>
+            <a:off x="11906250" y="3835400"/>
+            <a:ext cx="222250" cy="144000"/>
+          </a:xfrm>
+          <a:prstGeom prst="roundRect">
+            <a:avLst/>
+          </a:prstGeom>
+          <a:noFill/>
+          <a:ln>
+            <a:solidFill>
+              <a:srgbClr val="FF0000"/>
+            </a:solidFill>
+          </a:ln>
+        </p:spPr>
+        <p:style>
+          <a:lnRef idx="2">
+            <a:schemeClr val="accent1">
+              <a:shade val="15000"/>
+            </a:schemeClr>
+          </a:lnRef>
+          <a:fillRef idx="1">
+            <a:schemeClr val="accent1"/>
+          </a:fillRef>
+          <a:effectRef idx="0">
+            <a:schemeClr val="accent1"/>
+          </a:effectRef>
+          <a:fontRef idx="minor">
+            <a:schemeClr val="lt1"/>
+          </a:fontRef>
+        </p:style>
+        <p:txBody>
+          <a:bodyPr rtlCol="0" anchor="ctr"/>
+          <a:lstStyle/>
+          <a:p>
+            <a:pPr algn="ctr"/>
+            <a:endParaRPr lang="en-DK"/>
+          </a:p>
+        </p:txBody>
+      </p:sp>
+      <p:sp>
+        <p:nvSpPr>
+          <p:cNvPr id="5" name="Rectangle: Rounded Corners 4">
+            <a:extLst>
+              <a:ext uri="{FF2B5EF4-FFF2-40B4-BE49-F238E27FC236}">
+                <a16:creationId xmlns:a16="http://schemas.microsoft.com/office/drawing/2014/main" id="{6F0381DC-4BF2-F9D1-D2BB-DC3A2D9095D4}"/>
+              </a:ext>
+            </a:extLst>
+          </p:cNvPr>
+          <p:cNvSpPr/>
+          <p:nvPr/>
+        </p:nvSpPr>
+        <p:spPr>
+          <a:xfrm>
+            <a:off x="12163425" y="3835400"/>
+            <a:ext cx="222250" cy="144000"/>
+          </a:xfrm>
+          <a:prstGeom prst="roundRect">
+            <a:avLst/>
+          </a:prstGeom>
+          <a:noFill/>
+          <a:ln>
+            <a:solidFill>
+              <a:srgbClr val="FF0000"/>
+            </a:solidFill>
+          </a:ln>
+        </p:spPr>
+        <p:style>
+          <a:lnRef idx="2">
+            <a:schemeClr val="accent1">
+              <a:shade val="15000"/>
+            </a:schemeClr>
+          </a:lnRef>
+          <a:fillRef idx="1">
+            <a:schemeClr val="accent1"/>
+          </a:fillRef>
+          <a:effectRef idx="0">
+            <a:schemeClr val="accent1"/>
+          </a:effectRef>
+          <a:fontRef idx="minor">
+            <a:schemeClr val="lt1"/>
+          </a:fontRef>
+        </p:style>
+        <p:txBody>
+          <a:bodyPr rtlCol="0" anchor="ctr"/>
+          <a:lstStyle/>
+          <a:p>
+            <a:pPr algn="ctr"/>
+            <a:endParaRPr lang="en-DK"/>
+          </a:p>
+        </p:txBody>
+      </p:sp>
+      <p:sp>
+        <p:nvSpPr>
+          <p:cNvPr id="9" name="TextBox 8">
+            <a:extLst>
+              <a:ext uri="{FF2B5EF4-FFF2-40B4-BE49-F238E27FC236}">
+                <a16:creationId xmlns:a16="http://schemas.microsoft.com/office/drawing/2014/main" id="{43ED1834-B0E3-FC03-3846-4B4B0C37DDF6}"/>
+              </a:ext>
+            </a:extLst>
+          </p:cNvPr>
+          <p:cNvSpPr txBox="1"/>
+          <p:nvPr/>
+        </p:nvSpPr>
+        <p:spPr>
+          <a:xfrm>
+            <a:off x="11129247" y="3012326"/>
+            <a:ext cx="1776255" cy="369332"/>
+          </a:xfrm>
+          <a:prstGeom prst="rect">
+            <a:avLst/>
+          </a:prstGeom>
+          <a:noFill/>
+        </p:spPr>
+        <p:txBody>
+          <a:bodyPr wrap="none" rtlCol="0">
+            <a:spAutoFit/>
+          </a:bodyPr>
+          <a:lstStyle/>
+          <a:p>
+            <a:r>
+              <a:rPr lang="en-US" dirty="0"/>
+              <a:t>Update location</a:t>
+            </a:r>
+            <a:endParaRPr lang="en-DK" dirty="0"/>
+          </a:p>
+        </p:txBody>
+      </p:sp>
+      <p:sp>
+        <p:nvSpPr>
+          <p:cNvPr id="10" name="TextBox 9">
+            <a:extLst>
+              <a:ext uri="{FF2B5EF4-FFF2-40B4-BE49-F238E27FC236}">
+                <a16:creationId xmlns:a16="http://schemas.microsoft.com/office/drawing/2014/main" id="{B82B89E4-4B0B-0CD5-FA49-995556A69C59}"/>
+              </a:ext>
+            </a:extLst>
+          </p:cNvPr>
+          <p:cNvSpPr txBox="1"/>
+          <p:nvPr/>
+        </p:nvSpPr>
+        <p:spPr>
+          <a:xfrm>
+            <a:off x="12801600" y="3722734"/>
+            <a:ext cx="2042034" cy="369332"/>
+          </a:xfrm>
+          <a:prstGeom prst="rect">
+            <a:avLst/>
+          </a:prstGeom>
+          <a:noFill/>
+        </p:spPr>
+        <p:txBody>
+          <a:bodyPr wrap="none" rtlCol="0">
+            <a:spAutoFit/>
+          </a:bodyPr>
+          <a:lstStyle/>
+          <a:p>
+            <a:r>
+              <a:rPr lang="en-US" dirty="0"/>
+              <a:t>Remove repository</a:t>
+            </a:r>
+            <a:endParaRPr lang="en-DK" dirty="0"/>
+          </a:p>
+        </p:txBody>
+      </p:sp>
+      <p:cxnSp>
+        <p:nvCxnSpPr>
+          <p:cNvPr id="15" name="Straight Arrow Connector 14">
+            <a:extLst>
+              <a:ext uri="{FF2B5EF4-FFF2-40B4-BE49-F238E27FC236}">
+                <a16:creationId xmlns:a16="http://schemas.microsoft.com/office/drawing/2014/main" id="{61B124B7-5ADD-9F90-AFE0-B862D188CCE2}"/>
+              </a:ext>
+            </a:extLst>
+          </p:cNvPr>
+          <p:cNvCxnSpPr>
+            <a:stCxn id="9" idx="2"/>
+            <a:endCxn id="4" idx="0"/>
+          </p:cNvCxnSpPr>
+          <p:nvPr/>
+        </p:nvCxnSpPr>
+        <p:spPr>
+          <a:xfrm>
+            <a:off x="12017375" y="3381658"/>
+            <a:ext cx="0" cy="453742"/>
+          </a:xfrm>
+          <a:prstGeom prst="straightConnector1">
+            <a:avLst/>
+          </a:prstGeom>
+          <a:ln w="28575">
+            <a:solidFill>
+              <a:srgbClr val="FF0000"/>
+            </a:solidFill>
+            <a:tailEnd type="triangle"/>
+          </a:ln>
+        </p:spPr>
+        <p:style>
+          <a:lnRef idx="2">
+            <a:schemeClr val="accent1"/>
+          </a:lnRef>
+          <a:fillRef idx="0">
+            <a:schemeClr val="accent1"/>
+          </a:fillRef>
+          <a:effectRef idx="1">
+            <a:schemeClr val="accent1"/>
+          </a:effectRef>
+          <a:fontRef idx="minor">
+            <a:schemeClr val="tx1"/>
+          </a:fontRef>
+        </p:style>
+      </p:cxnSp>
+      <p:cxnSp>
+        <p:nvCxnSpPr>
+          <p:cNvPr id="16" name="Straight Arrow Connector 15">
+            <a:extLst>
+              <a:ext uri="{FF2B5EF4-FFF2-40B4-BE49-F238E27FC236}">
+                <a16:creationId xmlns:a16="http://schemas.microsoft.com/office/drawing/2014/main" id="{D62103A6-52C9-056A-CA2A-B980FE4C417A}"/>
+              </a:ext>
+            </a:extLst>
+          </p:cNvPr>
+          <p:cNvCxnSpPr>
+            <a:cxnSpLocks/>
+            <a:stCxn id="10" idx="1"/>
+            <a:endCxn id="5" idx="3"/>
+          </p:cNvCxnSpPr>
+          <p:nvPr/>
+        </p:nvCxnSpPr>
+        <p:spPr>
+          <a:xfrm flipH="1">
+            <a:off x="12385675" y="3907400"/>
+            <a:ext cx="415925" cy="0"/>
+          </a:xfrm>
+          <a:prstGeom prst="straightConnector1">
+            <a:avLst/>
+          </a:prstGeom>
+          <a:ln w="28575">
+            <a:solidFill>
+              <a:srgbClr val="FF0000"/>
+            </a:solidFill>
+            <a:tailEnd type="triangle"/>
+          </a:ln>
+        </p:spPr>
+        <p:style>
+          <a:lnRef idx="2">
+            <a:schemeClr val="accent1"/>
+          </a:lnRef>
+          <a:fillRef idx="0">
+            <a:schemeClr val="accent1"/>
+          </a:fillRef>
+          <a:effectRef idx="1">
+            <a:schemeClr val="accent1"/>
+          </a:effectRef>
+          <a:fontRef idx="minor">
+            <a:schemeClr val="tx1"/>
+          </a:fontRef>
+        </p:style>
+      </p:cxnSp>
+      <p:sp>
+        <p:nvSpPr>
+          <p:cNvPr id="6" name="Rectangle: Rounded Corners 5">
+            <a:extLst>
+              <a:ext uri="{FF2B5EF4-FFF2-40B4-BE49-F238E27FC236}">
+                <a16:creationId xmlns:a16="http://schemas.microsoft.com/office/drawing/2014/main" id="{5008F471-881E-40CB-47A7-D222C8B79256}"/>
+              </a:ext>
+            </a:extLst>
+          </p:cNvPr>
+          <p:cNvSpPr/>
+          <p:nvPr/>
+        </p:nvSpPr>
+        <p:spPr>
+          <a:xfrm>
+            <a:off x="12134849" y="4578350"/>
+            <a:ext cx="334963" cy="144000"/>
+          </a:xfrm>
+          <a:prstGeom prst="roundRect">
+            <a:avLst/>
+          </a:prstGeom>
+          <a:noFill/>
+          <a:ln>
+            <a:solidFill>
+              <a:srgbClr val="FF0000"/>
+            </a:solidFill>
+          </a:ln>
+        </p:spPr>
+        <p:style>
+          <a:lnRef idx="2">
+            <a:schemeClr val="accent1">
+              <a:shade val="15000"/>
+            </a:schemeClr>
+          </a:lnRef>
+          <a:fillRef idx="1">
+            <a:schemeClr val="accent1"/>
+          </a:fillRef>
+          <a:effectRef idx="0">
+            <a:schemeClr val="accent1"/>
+          </a:effectRef>
+          <a:fontRef idx="minor">
+            <a:schemeClr val="lt1"/>
+          </a:fontRef>
+        </p:style>
+        <p:txBody>
+          <a:bodyPr rtlCol="0" anchor="ctr"/>
+          <a:lstStyle/>
+          <a:p>
+            <a:pPr algn="ctr"/>
+            <a:endParaRPr lang="en-DK"/>
+          </a:p>
+        </p:txBody>
+      </p:sp>
+      <p:sp>
+        <p:nvSpPr>
+          <p:cNvPr id="7" name="Rectangle: Rounded Corners 6">
+            <a:extLst>
+              <a:ext uri="{FF2B5EF4-FFF2-40B4-BE49-F238E27FC236}">
+                <a16:creationId xmlns:a16="http://schemas.microsoft.com/office/drawing/2014/main" id="{FA6D0C3D-0FA2-BCB3-D8C2-BC6ACF97D4E6}"/>
+              </a:ext>
+            </a:extLst>
+          </p:cNvPr>
+          <p:cNvSpPr/>
+          <p:nvPr/>
+        </p:nvSpPr>
+        <p:spPr>
+          <a:xfrm>
+            <a:off x="12138024" y="4732735"/>
+            <a:ext cx="334963" cy="144000"/>
+          </a:xfrm>
+          <a:prstGeom prst="roundRect">
+            <a:avLst/>
+          </a:prstGeom>
+          <a:noFill/>
+          <a:ln>
+            <a:solidFill>
+              <a:srgbClr val="FF0000"/>
+            </a:solidFill>
+          </a:ln>
+        </p:spPr>
+        <p:style>
+          <a:lnRef idx="2">
+            <a:schemeClr val="accent1">
+              <a:shade val="15000"/>
+            </a:schemeClr>
+          </a:lnRef>
+          <a:fillRef idx="1">
+            <a:schemeClr val="accent1"/>
+          </a:fillRef>
+          <a:effectRef idx="0">
+            <a:schemeClr val="accent1"/>
+          </a:effectRef>
+          <a:fontRef idx="minor">
+            <a:schemeClr val="lt1"/>
+          </a:fontRef>
+        </p:style>
+        <p:txBody>
+          <a:bodyPr rtlCol="0" anchor="ctr"/>
+          <a:lstStyle/>
+          <a:p>
+            <a:pPr algn="ctr"/>
+            <a:endParaRPr lang="en-DK"/>
+          </a:p>
+        </p:txBody>
+      </p:sp>
+      <p:sp>
+        <p:nvSpPr>
+          <p:cNvPr id="11" name="TextBox 10">
+            <a:extLst>
+              <a:ext uri="{FF2B5EF4-FFF2-40B4-BE49-F238E27FC236}">
+                <a16:creationId xmlns:a16="http://schemas.microsoft.com/office/drawing/2014/main" id="{A40B5972-7C1A-6921-B1B3-70F6351BACAF}"/>
+              </a:ext>
+            </a:extLst>
+          </p:cNvPr>
+          <p:cNvSpPr txBox="1"/>
+          <p:nvPr/>
+        </p:nvSpPr>
+        <p:spPr>
+          <a:xfrm>
+            <a:off x="12801600" y="4465684"/>
+            <a:ext cx="1631344" cy="369332"/>
+          </a:xfrm>
+          <a:prstGeom prst="rect">
+            <a:avLst/>
+          </a:prstGeom>
+          <a:noFill/>
+        </p:spPr>
+        <p:txBody>
+          <a:bodyPr wrap="none" rtlCol="0">
+            <a:spAutoFit/>
+          </a:bodyPr>
+          <a:lstStyle/>
+          <a:p>
+            <a:r>
+              <a:rPr lang="en-US" dirty="0"/>
+              <a:t>Add repository</a:t>
+            </a:r>
+            <a:endParaRPr lang="en-DK" dirty="0"/>
+          </a:p>
+        </p:txBody>
+      </p:sp>
+      <p:sp>
+        <p:nvSpPr>
+          <p:cNvPr id="13" name="TextBox 12">
+            <a:extLst>
+              <a:ext uri="{FF2B5EF4-FFF2-40B4-BE49-F238E27FC236}">
+                <a16:creationId xmlns:a16="http://schemas.microsoft.com/office/drawing/2014/main" id="{C12D1223-F6F1-5380-6C88-7362283ECEC7}"/>
+              </a:ext>
+            </a:extLst>
+          </p:cNvPr>
+          <p:cNvSpPr txBox="1"/>
+          <p:nvPr/>
+        </p:nvSpPr>
+        <p:spPr>
+          <a:xfrm>
+            <a:off x="11593642" y="5098900"/>
+            <a:ext cx="1417376" cy="369332"/>
+          </a:xfrm>
+          <a:prstGeom prst="rect">
+            <a:avLst/>
+          </a:prstGeom>
+          <a:noFill/>
+        </p:spPr>
+        <p:txBody>
+          <a:bodyPr wrap="none" rtlCol="0">
+            <a:spAutoFit/>
+          </a:bodyPr>
+          <a:lstStyle/>
+          <a:p>
+            <a:r>
+              <a:rPr lang="en-US" dirty="0"/>
+              <a:t>Close dialog</a:t>
+            </a:r>
+            <a:endParaRPr lang="en-DK" dirty="0"/>
+          </a:p>
+        </p:txBody>
+      </p:sp>
+      <p:cxnSp>
+        <p:nvCxnSpPr>
+          <p:cNvPr id="18" name="Straight Arrow Connector 17">
+            <a:extLst>
+              <a:ext uri="{FF2B5EF4-FFF2-40B4-BE49-F238E27FC236}">
+                <a16:creationId xmlns:a16="http://schemas.microsoft.com/office/drawing/2014/main" id="{48DDB2B8-9DBF-CA34-FF5F-A8164BBB3E14}"/>
+              </a:ext>
+            </a:extLst>
+          </p:cNvPr>
+          <p:cNvCxnSpPr>
+            <a:cxnSpLocks/>
+            <a:stCxn id="13" idx="0"/>
+            <a:endCxn id="7" idx="2"/>
+          </p:cNvCxnSpPr>
+          <p:nvPr/>
+        </p:nvCxnSpPr>
+        <p:spPr>
+          <a:xfrm flipV="1">
+            <a:off x="12302330" y="4876735"/>
+            <a:ext cx="3176" cy="222165"/>
+          </a:xfrm>
+          <a:prstGeom prst="straightConnector1">
+            <a:avLst/>
+          </a:prstGeom>
+          <a:ln w="28575">
+            <a:solidFill>
+              <a:srgbClr val="FF0000"/>
+            </a:solidFill>
+            <a:tailEnd type="triangle"/>
+          </a:ln>
+        </p:spPr>
+        <p:style>
+          <a:lnRef idx="2">
+            <a:schemeClr val="accent1"/>
+          </a:lnRef>
+          <a:fillRef idx="0">
+            <a:schemeClr val="accent1"/>
+          </a:fillRef>
+          <a:effectRef idx="1">
+            <a:schemeClr val="accent1"/>
+          </a:effectRef>
+          <a:fontRef idx="minor">
+            <a:schemeClr val="tx1"/>
+          </a:fontRef>
+        </p:style>
+      </p:cxnSp>
+      <p:cxnSp>
+        <p:nvCxnSpPr>
+          <p:cNvPr id="19" name="Straight Arrow Connector 18">
+            <a:extLst>
+              <a:ext uri="{FF2B5EF4-FFF2-40B4-BE49-F238E27FC236}">
+                <a16:creationId xmlns:a16="http://schemas.microsoft.com/office/drawing/2014/main" id="{02866BD7-541C-D1A2-801E-3FF99947A317}"/>
+              </a:ext>
+            </a:extLst>
+          </p:cNvPr>
+          <p:cNvCxnSpPr>
+            <a:cxnSpLocks/>
+            <a:stCxn id="11" idx="1"/>
+            <a:endCxn id="6" idx="3"/>
+          </p:cNvCxnSpPr>
+          <p:nvPr/>
+        </p:nvCxnSpPr>
+        <p:spPr>
+          <a:xfrm flipH="1">
+            <a:off x="12469812" y="4650350"/>
+            <a:ext cx="331788" cy="0"/>
+          </a:xfrm>
+          <a:prstGeom prst="straightConnector1">
+            <a:avLst/>
+          </a:prstGeom>
+          <a:ln w="28575">
+            <a:solidFill>
+              <a:srgbClr val="FF0000"/>
+            </a:solidFill>
+            <a:tailEnd type="triangle"/>
+          </a:ln>
+        </p:spPr>
+        <p:style>
+          <a:lnRef idx="2">
+            <a:schemeClr val="accent1"/>
+          </a:lnRef>
+          <a:fillRef idx="0">
+            <a:schemeClr val="accent1"/>
+          </a:fillRef>
+          <a:effectRef idx="1">
+            <a:schemeClr val="accent1"/>
+          </a:effectRef>
+          <a:fontRef idx="minor">
+            <a:schemeClr val="tx1"/>
+          </a:fontRef>
+        </p:style>
+      </p:cxnSp>
+      <p:sp>
+        <p:nvSpPr>
+          <p:cNvPr id="8" name="Rectangle 7">
+            <a:extLst>
+              <a:ext uri="{FF2B5EF4-FFF2-40B4-BE49-F238E27FC236}">
+                <a16:creationId xmlns:a16="http://schemas.microsoft.com/office/drawing/2014/main" id="{02F6FC21-84A8-AB38-A5F4-8549D5CC7596}"/>
+              </a:ext>
+            </a:extLst>
+          </p:cNvPr>
+          <p:cNvSpPr/>
+          <p:nvPr/>
+        </p:nvSpPr>
+        <p:spPr>
+          <a:xfrm>
+            <a:off x="8908256" y="4572000"/>
+            <a:ext cx="3198019" cy="203200"/>
+          </a:xfrm>
+          <a:prstGeom prst="rect">
+            <a:avLst/>
+          </a:prstGeom>
+          <a:noFill/>
+          <a:ln>
+            <a:solidFill>
+              <a:srgbClr val="FF0000"/>
+            </a:solidFill>
+          </a:ln>
+        </p:spPr>
+        <p:style>
+          <a:lnRef idx="2">
+            <a:schemeClr val="accent1">
+              <a:shade val="15000"/>
+            </a:schemeClr>
+          </a:lnRef>
+          <a:fillRef idx="1">
+            <a:schemeClr val="accent1"/>
+          </a:fillRef>
+          <a:effectRef idx="0">
+            <a:schemeClr val="accent1"/>
+          </a:effectRef>
+          <a:fontRef idx="minor">
+            <a:schemeClr val="lt1"/>
+          </a:fontRef>
+        </p:style>
+        <p:txBody>
+          <a:bodyPr rtlCol="0" anchor="ctr"/>
+          <a:lstStyle/>
+          <a:p>
+            <a:pPr algn="ctr"/>
+            <a:endParaRPr lang="en-DK"/>
+          </a:p>
+        </p:txBody>
+      </p:sp>
+      <p:sp>
+        <p:nvSpPr>
+          <p:cNvPr id="12" name="TextBox 11">
+            <a:extLst>
+              <a:ext uri="{FF2B5EF4-FFF2-40B4-BE49-F238E27FC236}">
+                <a16:creationId xmlns:a16="http://schemas.microsoft.com/office/drawing/2014/main" id="{8FAFC5A9-C559-40F4-A3BC-535E10AC22BA}"/>
+              </a:ext>
+            </a:extLst>
+          </p:cNvPr>
+          <p:cNvSpPr txBox="1"/>
+          <p:nvPr/>
+        </p:nvSpPr>
+        <p:spPr>
+          <a:xfrm>
+            <a:off x="7479467" y="4488934"/>
+            <a:ext cx="1052276" cy="369332"/>
+          </a:xfrm>
+          <a:prstGeom prst="rect">
+            <a:avLst/>
+          </a:prstGeom>
+          <a:noFill/>
+        </p:spPr>
+        <p:txBody>
+          <a:bodyPr wrap="none" rtlCol="0">
+            <a:spAutoFit/>
+          </a:bodyPr>
+          <a:lstStyle/>
+          <a:p>
+            <a:r>
+              <a:rPr lang="en-US" dirty="0"/>
+              <a:t>Location</a:t>
+            </a:r>
+            <a:endParaRPr lang="en-DK" dirty="0"/>
+          </a:p>
+        </p:txBody>
+      </p:sp>
+      <p:cxnSp>
+        <p:nvCxnSpPr>
+          <p:cNvPr id="17" name="Straight Arrow Connector 16">
+            <a:extLst>
+              <a:ext uri="{FF2B5EF4-FFF2-40B4-BE49-F238E27FC236}">
+                <a16:creationId xmlns:a16="http://schemas.microsoft.com/office/drawing/2014/main" id="{D3DB800B-A2F6-1A8D-E7CD-A6D21B088899}"/>
+              </a:ext>
+            </a:extLst>
+          </p:cNvPr>
+          <p:cNvCxnSpPr>
+            <a:cxnSpLocks/>
+            <a:stCxn id="12" idx="3"/>
+            <a:endCxn id="8" idx="1"/>
+          </p:cNvCxnSpPr>
+          <p:nvPr/>
+        </p:nvCxnSpPr>
+        <p:spPr>
+          <a:xfrm>
+            <a:off x="8531743" y="4673600"/>
+            <a:ext cx="376513" cy="0"/>
+          </a:xfrm>
+          <a:prstGeom prst="straightConnector1">
+            <a:avLst/>
+          </a:prstGeom>
+          <a:ln w="28575">
+            <a:solidFill>
+              <a:srgbClr val="FF0000"/>
+            </a:solidFill>
+            <a:tailEnd type="triangle"/>
+          </a:ln>
+        </p:spPr>
+        <p:style>
+          <a:lnRef idx="2">
+            <a:schemeClr val="accent1"/>
+          </a:lnRef>
+          <a:fillRef idx="0">
+            <a:schemeClr val="accent1"/>
+          </a:fillRef>
+          <a:effectRef idx="1">
+            <a:schemeClr val="accent1"/>
+          </a:effectRef>
+          <a:fontRef idx="minor">
+            <a:schemeClr val="tx1"/>
+          </a:fontRef>
+        </p:style>
+      </p:cxnSp>
     </p:spTree>
     <p:extLst>
       <p:ext uri="{BB962C8B-B14F-4D97-AF65-F5344CB8AC3E}">
         <p14:creationId xmlns:p14="http://schemas.microsoft.com/office/powerpoint/2010/main" val="2435479675"/>
+      </p:ext>
+    </p:extLst>
+  </p:cSld>
+  <p:clrMapOvr>
+    <a:masterClrMapping/>
+  </p:clrMapOvr>
+</p:sld>
+</file>
+
+<file path=ppt/slides/slide3.xml><?xml version="1.0" encoding="utf-8"?>
+<p:sld xmlns:a="http://schemas.openxmlformats.org/drawingml/2006/main" xmlns:r="http://schemas.openxmlformats.org/officeDocument/2006/relationships" xmlns:p="http://schemas.openxmlformats.org/presentationml/2006/main">
+  <p:cSld>
+    <p:spTree>
+      <p:nvGrpSpPr>
+        <p:cNvPr id="1" name=""/>
+        <p:cNvGrpSpPr/>
+        <p:nvPr/>
+      </p:nvGrpSpPr>
+      <p:grpSpPr>
+        <a:xfrm>
+          <a:off x="0" y="0"/>
+          <a:ext cx="0" cy="0"/>
+          <a:chOff x="0" y="0"/>
+          <a:chExt cx="0" cy="0"/>
+        </a:xfrm>
+      </p:grpSpPr>
+      <p:pic>
+        <p:nvPicPr>
+          <p:cNvPr id="4" name="Picture 3" descr="The image depicts a user interface with a LabBench experiment creation setup, including input fields for ID, intro, and store experiment options, and a cancel button.&#10;&#10;AI-generated content may be incorrect.">
+            <a:extLst>
+              <a:ext uri="{FF2B5EF4-FFF2-40B4-BE49-F238E27FC236}">
+                <a16:creationId xmlns:a16="http://schemas.microsoft.com/office/drawing/2014/main" id="{E98066E4-638E-0555-4DAD-C119516E501E}"/>
+              </a:ext>
+            </a:extLst>
+          </p:cNvPr>
+          <p:cNvPicPr>
+            <a:picLocks noChangeAspect="1"/>
+          </p:cNvPicPr>
+          <p:nvPr/>
+        </p:nvPicPr>
+        <p:blipFill>
+          <a:blip r:embed="rId2"/>
+          <a:srcRect b="3534"/>
+          <a:stretch>
+            <a:fillRect/>
+          </a:stretch>
+        </p:blipFill>
+        <p:spPr>
+          <a:xfrm>
+            <a:off x="8977855" y="4117011"/>
+            <a:ext cx="2236246" cy="1464640"/>
+          </a:xfrm>
+          <a:prstGeom prst="rect">
+            <a:avLst/>
+          </a:prstGeom>
+        </p:spPr>
+      </p:pic>
+    </p:spTree>
+    <p:extLst>
+      <p:ext uri="{BB962C8B-B14F-4D97-AF65-F5344CB8AC3E}">
+        <p14:creationId xmlns:p14="http://schemas.microsoft.com/office/powerpoint/2010/main" val="597052662"/>
       </p:ext>
     </p:extLst>
   </p:cSld>
@@ -4382,6 +5873,26 @@
 </file>
 
 <file path=customXml/item1.xml><?xml version="1.0" encoding="utf-8"?>
+<?mso-contentType ?>
+<FormTemplates xmlns="http://schemas.microsoft.com/sharepoint/v3/contenttype/forms">
+  <Display>DocumentLibraryForm</Display>
+  <Edit>DocumentLibraryForm</Edit>
+  <New>DocumentLibraryForm</New>
+</FormTemplates>
+</file>
+
+<file path=customXml/item2.xml><?xml version="1.0" encoding="utf-8"?>
+<p:properties xmlns:p="http://schemas.microsoft.com/office/2006/metadata/properties" xmlns:xsi="http://www.w3.org/2001/XMLSchema-instance" xmlns:pc="http://schemas.microsoft.com/office/infopath/2007/PartnerControls">
+  <documentManagement>
+    <TaxCatchAll xmlns="6dfb7b4b-871d-4c24-9d42-16b14ecd044c" xsi:nil="true"/>
+    <lcf76f155ced4ddcb4097134ff3c332f xmlns="51c7d8ad-74c8-4833-8478-0d0a5cafce0c">
+      <Terms xmlns="http://schemas.microsoft.com/office/infopath/2007/PartnerControls"/>
+    </lcf76f155ced4ddcb4097134ff3c332f>
+  </documentManagement>
+</p:properties>
+</file>
+
+<file path=customXml/item3.xml><?xml version="1.0" encoding="utf-8"?>
 <ct:contentTypeSchema xmlns:ct="http://schemas.microsoft.com/office/2006/metadata/contentType" xmlns:ma="http://schemas.microsoft.com/office/2006/metadata/properties/metaAttributes" ct:_="" ma:_="" ma:contentTypeName="Document" ma:contentTypeID="0x0101005B996248A2D0E04D87B9DBB54D269DA4" ma:contentTypeVersion="18" ma:contentTypeDescription="Create a new document." ma:contentTypeScope="" ma:versionID="f22bde94a6705f7f7e236c14bc19f189">
   <xsd:schema xmlns:xsd="http://www.w3.org/2001/XMLSchema" xmlns:xs="http://www.w3.org/2001/XMLSchema" xmlns:p="http://schemas.microsoft.com/office/2006/metadata/properties" xmlns:ns2="51c7d8ad-74c8-4833-8478-0d0a5cafce0c" xmlns:ns3="6dfb7b4b-871d-4c24-9d42-16b14ecd044c" targetNamespace="http://schemas.microsoft.com/office/2006/metadata/properties" ma:root="true" ma:fieldsID="273248db29f554cba2c15e8dd349c138" ns2:_="" ns3:_="">
     <xsd:import namespace="51c7d8ad-74c8-4833-8478-0d0a5cafce0c"/>
@@ -4636,27 +6147,26 @@
 </ct:contentTypeSchema>
 </file>
 
-<file path=customXml/item2.xml><?xml version="1.0" encoding="utf-8"?>
-<p:properties xmlns:p="http://schemas.microsoft.com/office/2006/metadata/properties" xmlns:xsi="http://www.w3.org/2001/XMLSchema-instance" xmlns:pc="http://schemas.microsoft.com/office/infopath/2007/PartnerControls">
-  <documentManagement>
-    <TaxCatchAll xmlns="6dfb7b4b-871d-4c24-9d42-16b14ecd044c" xsi:nil="true"/>
-    <lcf76f155ced4ddcb4097134ff3c332f xmlns="51c7d8ad-74c8-4833-8478-0d0a5cafce0c">
-      <Terms xmlns="http://schemas.microsoft.com/office/infopath/2007/PartnerControls"/>
-    </lcf76f155ced4ddcb4097134ff3c332f>
-  </documentManagement>
-</p:properties>
+<file path=customXml/itemProps1.xml><?xml version="1.0" encoding="utf-8"?>
+<ds:datastoreItem xmlns:ds="http://schemas.openxmlformats.org/officeDocument/2006/customXml" ds:itemID="{EF875D47-8106-485E-98E0-D60C6A98DA6A}">
+  <ds:schemaRefs>
+    <ds:schemaRef ds:uri="http://schemas.microsoft.com/sharepoint/v3/contenttype/forms"/>
+  </ds:schemaRefs>
+</ds:datastoreItem>
 </file>
 
-<file path=customXml/item3.xml><?xml version="1.0" encoding="utf-8"?>
-<?mso-contentType ?>
-<FormTemplates xmlns="http://schemas.microsoft.com/sharepoint/v3/contenttype/forms">
-  <Display>DocumentLibraryForm</Display>
-  <Edit>DocumentLibraryForm</Edit>
-  <New>DocumentLibraryForm</New>
-</FormTemplates>
+<file path=customXml/itemProps2.xml><?xml version="1.0" encoding="utf-8"?>
+<ds:datastoreItem xmlns:ds="http://schemas.openxmlformats.org/officeDocument/2006/customXml" ds:itemID="{2EF670CE-B0AA-4D52-AFC6-AA4BF7D46EEA}">
+  <ds:schemaRefs>
+    <ds:schemaRef ds:uri="http://schemas.microsoft.com/office/2006/metadata/properties"/>
+    <ds:schemaRef ds:uri="http://schemas.microsoft.com/office/infopath/2007/PartnerControls"/>
+    <ds:schemaRef ds:uri="6dfb7b4b-871d-4c24-9d42-16b14ecd044c"/>
+    <ds:schemaRef ds:uri="51c7d8ad-74c8-4833-8478-0d0a5cafce0c"/>
+  </ds:schemaRefs>
+</ds:datastoreItem>
 </file>
 
-<file path=customXml/itemProps1.xml><?xml version="1.0" encoding="utf-8"?>
+<file path=customXml/itemProps3.xml><?xml version="1.0" encoding="utf-8"?>
 <ds:datastoreItem xmlns:ds="http://schemas.openxmlformats.org/officeDocument/2006/customXml" ds:itemID="{172A1115-3E72-42E2-A544-7EAA53D3702E}">
   <ds:schemaRefs>
     <ds:schemaRef ds:uri="http://schemas.microsoft.com/office/2006/metadata/contentType"/>
@@ -4673,23 +6183,4 @@
     <ds:schemaRef ds:uri="http://schemas.microsoft.com/internal/obd"/>
   </ds:schemaRefs>
 </ds:datastoreItem>
-</file>
-
-<file path=customXml/itemProps2.xml><?xml version="1.0" encoding="utf-8"?>
-<ds:datastoreItem xmlns:ds="http://schemas.openxmlformats.org/officeDocument/2006/customXml" ds:itemID="{2EF670CE-B0AA-4D52-AFC6-AA4BF7D46EEA}">
-  <ds:schemaRefs>
-    <ds:schemaRef ds:uri="http://schemas.microsoft.com/office/2006/metadata/properties"/>
-    <ds:schemaRef ds:uri="http://schemas.microsoft.com/office/infopath/2007/PartnerControls"/>
-    <ds:schemaRef ds:uri="6dfb7b4b-871d-4c24-9d42-16b14ecd044c"/>
-    <ds:schemaRef ds:uri="51c7d8ad-74c8-4833-8478-0d0a5cafce0c"/>
-  </ds:schemaRefs>
-</ds:datastoreItem>
-</file>
-
-<file path=customXml/itemProps3.xml><?xml version="1.0" encoding="utf-8"?>
-<ds:datastoreItem xmlns:ds="http://schemas.openxmlformats.org/officeDocument/2006/customXml" ds:itemID="{EF875D47-8106-485E-98E0-D60C6A98DA6A}">
-  <ds:schemaRefs>
-    <ds:schemaRef ds:uri="http://schemas.microsoft.com/sharepoint/v3/contenttype/forms"/>
-  </ds:schemaRefs>
-</ds:datastoreItem>
 </file>